--- a/assets/figures-editable/c1-c2/c2-e34.pptx
+++ b/assets/figures-editable/c1-c2/c2-e34.pptx
@@ -7,7 +7,7 @@
   <p:sldIdLst>
     <p:sldId id="256" r:id="rId7"/>
   </p:sldIdLst>
-  <p:sldSz cx="11948160" cy="7924799" type="screen4x3"/>
+  <p:sldSz cx="12191695" cy="6858000" type="screen4x3"/>
   <p:notesSz cx="6858000" cy="9144000"/>
   <p:defaultTextStyle>
     <a:defPPr>
@@ -3098,14 +3098,14 @@
       <p:grpSpPr/>
       <p:sp>
         <p:nvSpPr>
-          <p:cNvPr id="2" name="text1" descr="sci-ppt:C2-E34-001"/>
+          <p:cNvPr id="2" name="C2-E34 text 0" descr="sci-ppt:o000"/>
           <p:cNvSpPr txBox="1"/>
           <p:nvPr/>
         </p:nvSpPr>
         <p:spPr>
           <a:xfrm>
-            <a:off x="316992" y="268224"/>
-            <a:ext cx="11277600" cy="359054"/>
+            <a:off x="274320" y="118872"/>
+            <a:ext cx="11612880" cy="340105"/>
           </a:xfrm>
           <a:prstGeom prst="rect">
             <a:avLst/>
@@ -3114,7 +3114,7 @@
           <a:effectLst/>
         </p:spPr>
         <p:txBody>
-          <a:bodyPr wrap="none" lIns="27432" rIns="27432" tIns="18288" bIns="18288" anchor="ctr">
+          <a:bodyPr wrap="none" lIns="18288" rIns="18288" tIns="18288" bIns="18288" anchor="t">
             <a:spAutoFit/>
           </a:bodyPr>
           <a:lstStyle/>
@@ -3125,59 +3125,27 @@
               </a:spcAft>
             </a:pPr>
             <a:r>
-              <a:rPr sz="1823" b="0" i="0">
+              <a:rPr sz="1900" b="1" i="0">
                 <a:solidFill>
                   <a:srgbClr val="8EDBD4"/>
                 </a:solidFill>
                 <a:latin typeface="Arial"/>
               </a:rPr>
-              <a:t>C2-E34 | Physical-variable diagram</a:t>
-            </a:r>
-          </a:p>
-        </p:txBody>
-      </p:sp>
-      <p:sp>
-        <p:nvSpPr>
-          <p:cNvPr id="3" name="rect2" descr="sci-ppt:C2-E34-002"/>
-          <p:cNvSpPr/>
+              <a:t>C2-E34 · Original activation-probability formula</a:t>
+            </a:r>
+          </a:p>
+        </p:txBody>
+      </p:sp>
+      <p:sp>
+        <p:nvSpPr>
+          <p:cNvPr id="3" name="C2-E34 text 1" descr="sci-ppt:o001"/>
+          <p:cNvSpPr txBox="1"/>
           <p:nvPr/>
         </p:nvSpPr>
         <p:spPr>
           <a:xfrm>
-            <a:off x="1097280" y="1706880"/>
-            <a:ext cx="3901440" cy="1341120"/>
-          </a:xfrm>
-          <a:prstGeom prst="rect">
-            <a:avLst/>
-          </a:prstGeom>
-          <a:solidFill>
-            <a:srgbClr val="213E4B"/>
-          </a:solidFill>
-          <a:ln w="19050">
-            <a:solidFill>
-              <a:srgbClr val="B4C7D2"/>
-            </a:solidFill>
-          </a:ln>
-          <a:effectLst/>
-        </p:spPr>
-        <p:txBody>
-          <a:bodyPr rtlCol="0" anchor="ctr"/>
-          <a:lstStyle/>
-          <a:p>
-            <a:pPr algn="ctr"/>
-          </a:p>
-        </p:txBody>
-      </p:sp>
-      <p:sp>
-        <p:nvSpPr>
-          <p:cNvPr id="4" name="text3" descr="sci-ppt:C2-E34-003"/>
-          <p:cNvSpPr txBox="1"/>
-          <p:nvPr/>
-        </p:nvSpPr>
-        <p:spPr>
-          <a:xfrm>
-            <a:off x="1219200" y="1828800"/>
-            <a:ext cx="3718560" cy="340156"/>
+            <a:off x="457200" y="914400"/>
+            <a:ext cx="11247120" cy="355599"/>
           </a:xfrm>
           <a:prstGeom prst="rect">
             <a:avLst/>
@@ -3186,110 +3154,70 @@
           <a:effectLst/>
         </p:spPr>
         <p:txBody>
-          <a:bodyPr wrap="none" lIns="27432" rIns="27432" tIns="18288" bIns="18288" anchor="ctr">
+          <a:bodyPr wrap="none" lIns="18288" rIns="18288" tIns="18288" bIns="18288" anchor="t">
             <a:spAutoFit/>
           </a:bodyPr>
           <a:lstStyle/>
           <a:p>
-            <a:pPr algn="l">
+            <a:pPr algn="ctr">
               <a:spcAft>
                 <a:spcPts val="0"/>
               </a:spcAft>
             </a:pPr>
             <a:r>
-              <a:rPr sz="1728" b="0" i="0">
+              <a:rPr sz="2000" b="1" i="0">
                 <a:solidFill>
                   <a:srgbClr val="E7F0F3"/>
                 </a:solidFill>
                 <a:latin typeface="Arial"/>
               </a:rPr>
-              <a:t>Local rate J(T,p) in V_d</a:t>
-            </a:r>
-          </a:p>
-        </p:txBody>
-      </p:sp>
-      <p:cxnSp>
-        <p:nvCxnSpPr>
-          <p:cNvPr id="5" name="arrow4" descr="sci-ppt:C2-E34-004"/>
-          <p:cNvCxnSpPr/>
+              <a:t>P_act = 1 − exp[ − ∫₀ᵗ ∫ J(T, p) dV dt′ ]    (V = V_d(t′))</a:t>
+            </a:r>
+          </a:p>
+        </p:txBody>
+      </p:sp>
+      <p:sp>
+        <p:nvSpPr>
+          <p:cNvPr id="4" name="C2-E34 round_rect 2" descr="sci-ppt:o002"/>
+          <p:cNvSpPr/>
           <p:nvPr/>
-        </p:nvCxnSpPr>
+        </p:nvSpPr>
         <p:spPr>
           <a:xfrm>
-            <a:off x="5120640" y="2377440"/>
-            <a:ext cx="1097280" cy="0"/>
+            <a:off x="548640" y="1828800"/>
+            <a:ext cx="3566160" cy="2468880"/>
           </a:xfrm>
-          <a:prstGeom prst="line">
+          <a:prstGeom prst="roundRect">
             <a:avLst/>
           </a:prstGeom>
-          <a:ln w="25400">
+          <a:solidFill>
+            <a:srgbClr val="213E4B"/>
+          </a:solidFill>
+          <a:ln w="20320">
             <a:solidFill>
-              <a:srgbClr val="8EDBD4"/>
+              <a:srgbClr val="F28BA0"/>
             </a:solidFill>
-            <a:headEnd type="none" w="med" len="med"/>
-            <a:tailEnd type="triangle" w="med" len="med"/>
           </a:ln>
           <a:effectLst/>
         </p:spPr>
-      </p:cxnSp>
-      <p:cxnSp>
-        <p:nvCxnSpPr>
-          <p:cNvPr id="6" name="arrow5" descr="sci-ppt:C2-E34-005"/>
-          <p:cNvCxnSpPr/>
+        <p:txBody>
+          <a:bodyPr rtlCol="0" anchor="ctr"/>
+          <a:lstStyle/>
+          <a:p>
+            <a:pPr algn="ctr"/>
+          </a:p>
+        </p:txBody>
+      </p:sp>
+      <p:sp>
+        <p:nvSpPr>
+          <p:cNvPr id="5" name="C2-E34 text 3" descr="sci-ppt:o003"/>
+          <p:cNvSpPr txBox="1"/>
           <p:nvPr/>
-        </p:nvCxnSpPr>
+        </p:nvSpPr>
         <p:spPr>
           <a:xfrm>
-            <a:off x="6705600" y="3962399"/>
-            <a:ext cx="4267200" cy="0"/>
-          </a:xfrm>
-          <a:prstGeom prst="line">
-            <a:avLst/>
-          </a:prstGeom>
-          <a:ln w="25400">
-            <a:solidFill>
-              <a:srgbClr val="8EDBD4"/>
-            </a:solidFill>
-            <a:headEnd type="none" w="med" len="med"/>
-            <a:tailEnd type="triangle" w="med" len="med"/>
-          </a:ln>
-          <a:effectLst/>
-        </p:spPr>
-      </p:cxnSp>
-      <p:cxnSp>
-        <p:nvCxnSpPr>
-          <p:cNvPr id="7" name="arrow6" descr="sci-ppt:C2-E34-006"/>
-          <p:cNvCxnSpPr/>
-          <p:nvPr/>
-        </p:nvCxnSpPr>
-        <p:spPr>
-          <a:xfrm flipV="1">
-            <a:off x="6705600" y="1524000"/>
-            <a:ext cx="0" cy="2438399"/>
-          </a:xfrm>
-          <a:prstGeom prst="line">
-            <a:avLst/>
-          </a:prstGeom>
-          <a:ln w="25400">
-            <a:solidFill>
-              <a:srgbClr val="8EDBD4"/>
-            </a:solidFill>
-            <a:headEnd type="none" w="med" len="med"/>
-            <a:tailEnd type="triangle" w="med" len="med"/>
-          </a:ln>
-          <a:effectLst/>
-        </p:spPr>
-      </p:cxnSp>
-      <p:sp>
-        <p:nvSpPr>
-          <p:cNvPr id="8" name="text7" descr="sci-ppt:C2-E34-007"/>
-          <p:cNvSpPr txBox="1"/>
-          <p:nvPr/>
-        </p:nvSpPr>
-        <p:spPr>
-          <a:xfrm>
-            <a:off x="9997440" y="4084320"/>
-            <a:ext cx="1828800" cy="321259"/>
+            <a:off x="640080" y="1920240"/>
+            <a:ext cx="3383280" cy="309117"/>
           </a:xfrm>
           <a:prstGeom prst="rect">
             <a:avLst/>
@@ -3298,38 +3226,38 @@
           <a:effectLst/>
         </p:spPr>
         <p:txBody>
-          <a:bodyPr wrap="none" lIns="27432" rIns="27432" tIns="18288" bIns="18288" anchor="ctr">
+          <a:bodyPr wrap="none" lIns="18288" rIns="18288" tIns="18288" bIns="18288" anchor="t">
             <a:spAutoFit/>
           </a:bodyPr>
           <a:lstStyle/>
           <a:p>
-            <a:pPr algn="l">
+            <a:pPr algn="ctr">
               <a:spcAft>
                 <a:spcPts val="0"/>
               </a:spcAft>
             </a:pPr>
             <a:r>
-              <a:rPr sz="1632" b="0" i="0">
+              <a:rPr sz="1700" b="1" i="0">
                 <a:solidFill>
-                  <a:srgbClr val="E7F0F3"/>
+                  <a:srgbClr val="F28BA0"/>
                 </a:solidFill>
                 <a:latin typeface="Arial"/>
               </a:rPr>
-              <a:t>Integrated hazard</a:t>
-            </a:r>
-          </a:p>
-        </p:txBody>
-      </p:sp>
-      <p:sp>
-        <p:nvSpPr>
-          <p:cNvPr id="9" name="text8" descr="sci-ppt:C2-E34-008"/>
+              <a:t>J(T, p)</a:t>
+            </a:r>
+          </a:p>
+        </p:txBody>
+      </p:sp>
+      <p:sp>
+        <p:nvSpPr>
+          <p:cNvPr id="6" name="C2-E34 text 4" descr="sci-ppt:o004"/>
           <p:cNvSpPr txBox="1"/>
           <p:nvPr/>
         </p:nvSpPr>
         <p:spPr>
           <a:xfrm>
-            <a:off x="6583680" y="1158240"/>
-            <a:ext cx="3657600" cy="321259"/>
+            <a:off x="640080" y="2606040"/>
+            <a:ext cx="3383280" cy="448563"/>
           </a:xfrm>
           <a:prstGeom prst="rect">
             <a:avLst/>
@@ -3338,808 +3266,54 @@
           <a:effectLst/>
         </p:spPr>
         <p:txBody>
-          <a:bodyPr wrap="none" lIns="27432" rIns="27432" tIns="18288" bIns="18288" anchor="ctr">
+          <a:bodyPr wrap="none" lIns="18288" rIns="18288" tIns="18288" bIns="18288" anchor="t">
             <a:spAutoFit/>
           </a:bodyPr>
           <a:lstStyle/>
           <a:p>
-            <a:pPr algn="l">
+            <a:pPr algn="ctr">
               <a:spcAft>
                 <a:spcPts val="0"/>
               </a:spcAft>
             </a:pPr>
             <a:r>
-              <a:rPr sz="1632" b="0" i="0">
+              <a:rPr sz="1300" b="0" i="0">
                 <a:solidFill>
                   <a:srgbClr val="E7F0F3"/>
                 </a:solidFill>
                 <a:latin typeface="Arial"/>
               </a:rPr>
-              <a:t>P_act</a:t>
-            </a:r>
-          </a:p>
-        </p:txBody>
-      </p:sp>
-      <p:cxnSp>
-        <p:nvCxnSpPr>
-          <p:cNvPr id="10" name="line9" descr="sci-ppt:C2-E34-009"/>
-          <p:cNvCxnSpPr/>
-          <p:nvPr/>
-        </p:nvCxnSpPr>
-        <p:spPr>
-          <a:xfrm flipV="1">
-            <a:off x="6766560" y="3716163"/>
-            <a:ext cx="114953" cy="185277"/>
-          </a:xfrm>
-          <a:prstGeom prst="line">
-            <a:avLst/>
-          </a:prstGeom>
-          <a:ln w="25400">
-            <a:solidFill>
-              <a:srgbClr val="8EDBD4"/>
-            </a:solidFill>
-          </a:ln>
-          <a:effectLst/>
-        </p:spPr>
-      </p:cxnSp>
-      <p:cxnSp>
-        <p:nvCxnSpPr>
-          <p:cNvPr id="11" name="line10" descr="sci-ppt:C2-E34-010"/>
-          <p:cNvCxnSpPr/>
-          <p:nvPr/>
-        </p:nvCxnSpPr>
-        <p:spPr>
-          <a:xfrm flipV="1">
-            <a:off x="6881513" y="3546106"/>
-            <a:ext cx="114953" cy="170057"/>
-          </a:xfrm>
-          <a:prstGeom prst="line">
-            <a:avLst/>
-          </a:prstGeom>
-          <a:ln w="25400">
-            <a:solidFill>
-              <a:srgbClr val="8EDBD4"/>
-            </a:solidFill>
-          </a:ln>
-          <a:effectLst/>
-        </p:spPr>
-      </p:cxnSp>
-      <p:cxnSp>
-        <p:nvCxnSpPr>
-          <p:cNvPr id="12" name="line11" descr="sci-ppt:C2-E34-011"/>
-          <p:cNvCxnSpPr/>
-          <p:nvPr/>
-        </p:nvCxnSpPr>
-        <p:spPr>
-          <a:xfrm flipV="1">
-            <a:off x="6996466" y="3390018"/>
-            <a:ext cx="114953" cy="156088"/>
-          </a:xfrm>
-          <a:prstGeom prst="line">
-            <a:avLst/>
-          </a:prstGeom>
-          <a:ln w="25400">
-            <a:solidFill>
-              <a:srgbClr val="8EDBD4"/>
-            </a:solidFill>
-          </a:ln>
-          <a:effectLst/>
-        </p:spPr>
-      </p:cxnSp>
-      <p:cxnSp>
-        <p:nvCxnSpPr>
-          <p:cNvPr id="13" name="line12" descr="sci-ppt:C2-E34-012"/>
-          <p:cNvCxnSpPr/>
-          <p:nvPr/>
-        </p:nvCxnSpPr>
-        <p:spPr>
-          <a:xfrm flipV="1">
-            <a:off x="7111419" y="3246751"/>
-            <a:ext cx="114953" cy="143267"/>
-          </a:xfrm>
-          <a:prstGeom prst="line">
-            <a:avLst/>
-          </a:prstGeom>
-          <a:ln w="25400">
-            <a:solidFill>
-              <a:srgbClr val="8EDBD4"/>
-            </a:solidFill>
-          </a:ln>
-          <a:effectLst/>
-        </p:spPr>
-      </p:cxnSp>
-      <p:cxnSp>
-        <p:nvCxnSpPr>
-          <p:cNvPr id="14" name="line13" descr="sci-ppt:C2-E34-013"/>
-          <p:cNvCxnSpPr/>
-          <p:nvPr/>
-        </p:nvCxnSpPr>
-        <p:spPr>
-          <a:xfrm flipV="1">
-            <a:off x="7226372" y="3115253"/>
-            <a:ext cx="114953" cy="131498"/>
-          </a:xfrm>
-          <a:prstGeom prst="line">
-            <a:avLst/>
-          </a:prstGeom>
-          <a:ln w="25400">
-            <a:solidFill>
-              <a:srgbClr val="8EDBD4"/>
-            </a:solidFill>
-          </a:ln>
-          <a:effectLst/>
-        </p:spPr>
-      </p:cxnSp>
-      <p:cxnSp>
-        <p:nvCxnSpPr>
-          <p:cNvPr id="15" name="line14" descr="sci-ppt:C2-E34-014"/>
-          <p:cNvCxnSpPr/>
-          <p:nvPr/>
-        </p:nvCxnSpPr>
-        <p:spPr>
-          <a:xfrm flipV="1">
-            <a:off x="7341325" y="2994557"/>
-            <a:ext cx="114953" cy="120696"/>
-          </a:xfrm>
-          <a:prstGeom prst="line">
-            <a:avLst/>
-          </a:prstGeom>
-          <a:ln w="25400">
-            <a:solidFill>
-              <a:srgbClr val="8EDBD4"/>
-            </a:solidFill>
-          </a:ln>
-          <a:effectLst/>
-        </p:spPr>
-      </p:cxnSp>
-      <p:cxnSp>
-        <p:nvCxnSpPr>
-          <p:cNvPr id="16" name="line15" descr="sci-ppt:C2-E34-015"/>
-          <p:cNvCxnSpPr/>
-          <p:nvPr/>
-        </p:nvCxnSpPr>
-        <p:spPr>
-          <a:xfrm flipV="1">
-            <a:off x="7456278" y="2883775"/>
-            <a:ext cx="114953" cy="110782"/>
-          </a:xfrm>
-          <a:prstGeom prst="line">
-            <a:avLst/>
-          </a:prstGeom>
-          <a:ln w="25400">
-            <a:solidFill>
-              <a:srgbClr val="8EDBD4"/>
-            </a:solidFill>
-          </a:ln>
-          <a:effectLst/>
-        </p:spPr>
-      </p:cxnSp>
-      <p:cxnSp>
-        <p:nvCxnSpPr>
-          <p:cNvPr id="17" name="line16" descr="sci-ppt:C2-E34-016"/>
-          <p:cNvCxnSpPr/>
-          <p:nvPr/>
-        </p:nvCxnSpPr>
-        <p:spPr>
-          <a:xfrm flipV="1">
-            <a:off x="7571231" y="2782093"/>
-            <a:ext cx="114954" cy="101682"/>
-          </a:xfrm>
-          <a:prstGeom prst="line">
-            <a:avLst/>
-          </a:prstGeom>
-          <a:ln w="25400">
-            <a:solidFill>
-              <a:srgbClr val="8EDBD4"/>
-            </a:solidFill>
-          </a:ln>
-          <a:effectLst/>
-        </p:spPr>
-      </p:cxnSp>
-      <p:cxnSp>
-        <p:nvCxnSpPr>
-          <p:cNvPr id="18" name="line17" descr="sci-ppt:C2-E34-017"/>
-          <p:cNvCxnSpPr/>
-          <p:nvPr/>
-        </p:nvCxnSpPr>
-        <p:spPr>
-          <a:xfrm flipV="1">
-            <a:off x="7686185" y="2688764"/>
-            <a:ext cx="114953" cy="93329"/>
-          </a:xfrm>
-          <a:prstGeom prst="line">
-            <a:avLst/>
-          </a:prstGeom>
-          <a:ln w="25400">
-            <a:solidFill>
-              <a:srgbClr val="8EDBD4"/>
-            </a:solidFill>
-          </a:ln>
-          <a:effectLst/>
-        </p:spPr>
-      </p:cxnSp>
-      <p:cxnSp>
-        <p:nvCxnSpPr>
-          <p:cNvPr id="19" name="line18" descr="sci-ppt:C2-E34-018"/>
-          <p:cNvCxnSpPr/>
-          <p:nvPr/>
-        </p:nvCxnSpPr>
-        <p:spPr>
-          <a:xfrm flipV="1">
-            <a:off x="7801138" y="2603101"/>
-            <a:ext cx="114953" cy="85663"/>
-          </a:xfrm>
-          <a:prstGeom prst="line">
-            <a:avLst/>
-          </a:prstGeom>
-          <a:ln w="25400">
-            <a:solidFill>
-              <a:srgbClr val="8EDBD4"/>
-            </a:solidFill>
-          </a:ln>
-          <a:effectLst/>
-        </p:spPr>
-      </p:cxnSp>
-      <p:cxnSp>
-        <p:nvCxnSpPr>
-          <p:cNvPr id="20" name="line19" descr="sci-ppt:C2-E34-019"/>
-          <p:cNvCxnSpPr/>
-          <p:nvPr/>
-        </p:nvCxnSpPr>
-        <p:spPr>
-          <a:xfrm flipV="1">
-            <a:off x="7916091" y="2524475"/>
-            <a:ext cx="114953" cy="78626"/>
-          </a:xfrm>
-          <a:prstGeom prst="line">
-            <a:avLst/>
-          </a:prstGeom>
-          <a:ln w="25400">
-            <a:solidFill>
-              <a:srgbClr val="8EDBD4"/>
-            </a:solidFill>
-          </a:ln>
-          <a:effectLst/>
-        </p:spPr>
-      </p:cxnSp>
-      <p:cxnSp>
-        <p:nvCxnSpPr>
-          <p:cNvPr id="21" name="line20" descr="sci-ppt:C2-E34-020"/>
-          <p:cNvCxnSpPr/>
-          <p:nvPr/>
-        </p:nvCxnSpPr>
-        <p:spPr>
-          <a:xfrm flipV="1">
-            <a:off x="8031044" y="2452307"/>
-            <a:ext cx="114953" cy="72168"/>
-          </a:xfrm>
-          <a:prstGeom prst="line">
-            <a:avLst/>
-          </a:prstGeom>
-          <a:ln w="25400">
-            <a:solidFill>
-              <a:srgbClr val="8EDBD4"/>
-            </a:solidFill>
-          </a:ln>
-          <a:effectLst/>
-        </p:spPr>
-      </p:cxnSp>
-      <p:cxnSp>
-        <p:nvCxnSpPr>
-          <p:cNvPr id="22" name="line21" descr="sci-ppt:C2-E34-021"/>
-          <p:cNvCxnSpPr/>
-          <p:nvPr/>
-        </p:nvCxnSpPr>
-        <p:spPr>
-          <a:xfrm flipV="1">
-            <a:off x="8145997" y="2386067"/>
-            <a:ext cx="114953" cy="66240"/>
-          </a:xfrm>
-          <a:prstGeom prst="line">
-            <a:avLst/>
-          </a:prstGeom>
-          <a:ln w="25400">
-            <a:solidFill>
-              <a:srgbClr val="8EDBD4"/>
-            </a:solidFill>
-          </a:ln>
-          <a:effectLst/>
-        </p:spPr>
-      </p:cxnSp>
-      <p:cxnSp>
-        <p:nvCxnSpPr>
-          <p:cNvPr id="23" name="line22" descr="sci-ppt:C2-E34-022"/>
-          <p:cNvCxnSpPr/>
-          <p:nvPr/>
-        </p:nvCxnSpPr>
-        <p:spPr>
-          <a:xfrm flipV="1">
-            <a:off x="8260950" y="2325269"/>
-            <a:ext cx="114954" cy="60798"/>
-          </a:xfrm>
-          <a:prstGeom prst="line">
-            <a:avLst/>
-          </a:prstGeom>
-          <a:ln w="25400">
-            <a:solidFill>
-              <a:srgbClr val="8EDBD4"/>
-            </a:solidFill>
-          </a:ln>
-          <a:effectLst/>
-        </p:spPr>
-      </p:cxnSp>
-      <p:cxnSp>
-        <p:nvCxnSpPr>
-          <p:cNvPr id="24" name="line23" descr="sci-ppt:C2-E34-023"/>
-          <p:cNvCxnSpPr/>
-          <p:nvPr/>
-        </p:nvCxnSpPr>
-        <p:spPr>
-          <a:xfrm flipV="1">
-            <a:off x="8375904" y="2269465"/>
-            <a:ext cx="114953" cy="55804"/>
-          </a:xfrm>
-          <a:prstGeom prst="line">
-            <a:avLst/>
-          </a:prstGeom>
-          <a:ln w="25400">
-            <a:solidFill>
-              <a:srgbClr val="8EDBD4"/>
-            </a:solidFill>
-          </a:ln>
-          <a:effectLst/>
-        </p:spPr>
-      </p:cxnSp>
-      <p:cxnSp>
-        <p:nvCxnSpPr>
-          <p:cNvPr id="25" name="line24" descr="sci-ppt:C2-E34-024"/>
-          <p:cNvCxnSpPr/>
-          <p:nvPr/>
-        </p:nvCxnSpPr>
-        <p:spPr>
-          <a:xfrm flipV="1">
-            <a:off x="8490857" y="2218245"/>
-            <a:ext cx="114953" cy="51220"/>
-          </a:xfrm>
-          <a:prstGeom prst="line">
-            <a:avLst/>
-          </a:prstGeom>
-          <a:ln w="25400">
-            <a:solidFill>
-              <a:srgbClr val="8EDBD4"/>
-            </a:solidFill>
-          </a:ln>
-          <a:effectLst/>
-        </p:spPr>
-      </p:cxnSp>
-      <p:cxnSp>
-        <p:nvCxnSpPr>
-          <p:cNvPr id="26" name="line25" descr="sci-ppt:C2-E34-025"/>
-          <p:cNvCxnSpPr/>
-          <p:nvPr/>
-        </p:nvCxnSpPr>
-        <p:spPr>
-          <a:xfrm flipV="1">
-            <a:off x="8605810" y="2171232"/>
-            <a:ext cx="114953" cy="47013"/>
-          </a:xfrm>
-          <a:prstGeom prst="line">
-            <a:avLst/>
-          </a:prstGeom>
-          <a:ln w="25400">
-            <a:solidFill>
-              <a:srgbClr val="8EDBD4"/>
-            </a:solidFill>
-          </a:ln>
-          <a:effectLst/>
-        </p:spPr>
-      </p:cxnSp>
-      <p:cxnSp>
-        <p:nvCxnSpPr>
-          <p:cNvPr id="27" name="line26" descr="sci-ppt:C2-E34-026"/>
-          <p:cNvCxnSpPr/>
-          <p:nvPr/>
-        </p:nvCxnSpPr>
-        <p:spPr>
-          <a:xfrm flipV="1">
-            <a:off x="8720763" y="2128081"/>
-            <a:ext cx="114953" cy="43151"/>
-          </a:xfrm>
-          <a:prstGeom prst="line">
-            <a:avLst/>
-          </a:prstGeom>
-          <a:ln w="25400">
-            <a:solidFill>
-              <a:srgbClr val="8EDBD4"/>
-            </a:solidFill>
-          </a:ln>
-          <a:effectLst/>
-        </p:spPr>
-      </p:cxnSp>
-      <p:cxnSp>
-        <p:nvCxnSpPr>
-          <p:cNvPr id="28" name="line27" descr="sci-ppt:C2-E34-027"/>
-          <p:cNvCxnSpPr/>
-          <p:nvPr/>
-        </p:nvCxnSpPr>
-        <p:spPr>
-          <a:xfrm flipV="1">
-            <a:off x="8835716" y="2088474"/>
-            <a:ext cx="114953" cy="39607"/>
-          </a:xfrm>
-          <a:prstGeom prst="line">
-            <a:avLst/>
-          </a:prstGeom>
-          <a:ln w="25400">
-            <a:solidFill>
-              <a:srgbClr val="8EDBD4"/>
-            </a:solidFill>
-          </a:ln>
-          <a:effectLst/>
-        </p:spPr>
-      </p:cxnSp>
-      <p:cxnSp>
-        <p:nvCxnSpPr>
-          <p:cNvPr id="29" name="line28" descr="sci-ppt:C2-E34-028"/>
-          <p:cNvCxnSpPr/>
-          <p:nvPr/>
-        </p:nvCxnSpPr>
-        <p:spPr>
-          <a:xfrm flipV="1">
-            <a:off x="8950669" y="2052121"/>
-            <a:ext cx="114953" cy="36353"/>
-          </a:xfrm>
-          <a:prstGeom prst="line">
-            <a:avLst/>
-          </a:prstGeom>
-          <a:ln w="25400">
-            <a:solidFill>
-              <a:srgbClr val="8EDBD4"/>
-            </a:solidFill>
-          </a:ln>
-          <a:effectLst/>
-        </p:spPr>
-      </p:cxnSp>
-      <p:cxnSp>
-        <p:nvCxnSpPr>
-          <p:cNvPr id="30" name="line29" descr="sci-ppt:C2-E34-029"/>
-          <p:cNvCxnSpPr/>
-          <p:nvPr/>
-        </p:nvCxnSpPr>
-        <p:spPr>
-          <a:xfrm flipV="1">
-            <a:off x="9065622" y="2018754"/>
-            <a:ext cx="114954" cy="33367"/>
-          </a:xfrm>
-          <a:prstGeom prst="line">
-            <a:avLst/>
-          </a:prstGeom>
-          <a:ln w="25400">
-            <a:solidFill>
-              <a:srgbClr val="8EDBD4"/>
-            </a:solidFill>
-          </a:ln>
-          <a:effectLst/>
-        </p:spPr>
-      </p:cxnSp>
-      <p:cxnSp>
-        <p:nvCxnSpPr>
-          <p:cNvPr id="31" name="line30" descr="sci-ppt:C2-E34-030"/>
-          <p:cNvCxnSpPr/>
-          <p:nvPr/>
-        </p:nvCxnSpPr>
-        <p:spPr>
-          <a:xfrm flipV="1">
-            <a:off x="9180576" y="1988128"/>
-            <a:ext cx="114953" cy="30626"/>
-          </a:xfrm>
-          <a:prstGeom prst="line">
-            <a:avLst/>
-          </a:prstGeom>
-          <a:ln w="25400">
-            <a:solidFill>
-              <a:srgbClr val="8EDBD4"/>
-            </a:solidFill>
-          </a:ln>
-          <a:effectLst/>
-        </p:spPr>
-      </p:cxnSp>
-      <p:cxnSp>
-        <p:nvCxnSpPr>
-          <p:cNvPr id="32" name="line31" descr="sci-ppt:C2-E34-031"/>
-          <p:cNvCxnSpPr/>
-          <p:nvPr/>
-        </p:nvCxnSpPr>
-        <p:spPr>
-          <a:xfrm flipV="1">
-            <a:off x="9295529" y="1960018"/>
-            <a:ext cx="114953" cy="28110"/>
-          </a:xfrm>
-          <a:prstGeom prst="line">
-            <a:avLst/>
-          </a:prstGeom>
-          <a:ln w="25400">
-            <a:solidFill>
-              <a:srgbClr val="8EDBD4"/>
-            </a:solidFill>
-          </a:ln>
-          <a:effectLst/>
-        </p:spPr>
-      </p:cxnSp>
-      <p:cxnSp>
-        <p:nvCxnSpPr>
-          <p:cNvPr id="33" name="line32" descr="sci-ppt:C2-E34-032"/>
-          <p:cNvCxnSpPr/>
-          <p:nvPr/>
-        </p:nvCxnSpPr>
-        <p:spPr>
-          <a:xfrm flipV="1">
-            <a:off x="9410482" y="1934217"/>
-            <a:ext cx="114953" cy="25801"/>
-          </a:xfrm>
-          <a:prstGeom prst="line">
-            <a:avLst/>
-          </a:prstGeom>
-          <a:ln w="25400">
-            <a:solidFill>
-              <a:srgbClr val="8EDBD4"/>
-            </a:solidFill>
-          </a:ln>
-          <a:effectLst/>
-        </p:spPr>
-      </p:cxnSp>
-      <p:cxnSp>
-        <p:nvCxnSpPr>
-          <p:cNvPr id="34" name="line33" descr="sci-ppt:C2-E34-033"/>
-          <p:cNvCxnSpPr/>
-          <p:nvPr/>
-        </p:nvCxnSpPr>
-        <p:spPr>
-          <a:xfrm flipV="1">
-            <a:off x="9525435" y="1910535"/>
-            <a:ext cx="114953" cy="23682"/>
-          </a:xfrm>
-          <a:prstGeom prst="line">
-            <a:avLst/>
-          </a:prstGeom>
-          <a:ln w="25400">
-            <a:solidFill>
-              <a:srgbClr val="8EDBD4"/>
-            </a:solidFill>
-          </a:ln>
-          <a:effectLst/>
-        </p:spPr>
-      </p:cxnSp>
-      <p:cxnSp>
-        <p:nvCxnSpPr>
-          <p:cNvPr id="35" name="line34" descr="sci-ppt:C2-E34-034"/>
-          <p:cNvCxnSpPr/>
-          <p:nvPr/>
-        </p:nvCxnSpPr>
-        <p:spPr>
-          <a:xfrm flipV="1">
-            <a:off x="9640388" y="1888799"/>
-            <a:ext cx="114953" cy="21736"/>
-          </a:xfrm>
-          <a:prstGeom prst="line">
-            <a:avLst/>
-          </a:prstGeom>
-          <a:ln w="25400">
-            <a:solidFill>
-              <a:srgbClr val="8EDBD4"/>
-            </a:solidFill>
-          </a:ln>
-          <a:effectLst/>
-        </p:spPr>
-      </p:cxnSp>
-      <p:cxnSp>
-        <p:nvCxnSpPr>
-          <p:cNvPr id="36" name="line35" descr="sci-ppt:C2-E34-035"/>
-          <p:cNvCxnSpPr/>
-          <p:nvPr/>
-        </p:nvCxnSpPr>
-        <p:spPr>
-          <a:xfrm flipV="1">
-            <a:off x="9755341" y="1868848"/>
-            <a:ext cx="114953" cy="19951"/>
-          </a:xfrm>
-          <a:prstGeom prst="line">
-            <a:avLst/>
-          </a:prstGeom>
-          <a:ln w="25400">
-            <a:solidFill>
-              <a:srgbClr val="8EDBD4"/>
-            </a:solidFill>
-          </a:ln>
-          <a:effectLst/>
-        </p:spPr>
-      </p:cxnSp>
-      <p:cxnSp>
-        <p:nvCxnSpPr>
-          <p:cNvPr id="37" name="line36" descr="sci-ppt:C2-E34-036"/>
-          <p:cNvCxnSpPr/>
-          <p:nvPr/>
-        </p:nvCxnSpPr>
-        <p:spPr>
-          <a:xfrm flipV="1">
-            <a:off x="9870294" y="1850536"/>
-            <a:ext cx="114954" cy="18312"/>
-          </a:xfrm>
-          <a:prstGeom prst="line">
-            <a:avLst/>
-          </a:prstGeom>
-          <a:ln w="25400">
-            <a:solidFill>
-              <a:srgbClr val="8EDBD4"/>
-            </a:solidFill>
-          </a:ln>
-          <a:effectLst/>
-        </p:spPr>
-      </p:cxnSp>
-      <p:cxnSp>
-        <p:nvCxnSpPr>
-          <p:cNvPr id="38" name="line37" descr="sci-ppt:C2-E34-037"/>
-          <p:cNvCxnSpPr/>
-          <p:nvPr/>
-        </p:nvCxnSpPr>
-        <p:spPr>
-          <a:xfrm flipV="1">
-            <a:off x="9985248" y="1833728"/>
-            <a:ext cx="114953" cy="16808"/>
-          </a:xfrm>
-          <a:prstGeom prst="line">
-            <a:avLst/>
-          </a:prstGeom>
-          <a:ln w="25400">
-            <a:solidFill>
-              <a:srgbClr val="8EDBD4"/>
-            </a:solidFill>
-          </a:ln>
-          <a:effectLst/>
-        </p:spPr>
-      </p:cxnSp>
-      <p:cxnSp>
-        <p:nvCxnSpPr>
-          <p:cNvPr id="39" name="line38" descr="sci-ppt:C2-E34-038"/>
-          <p:cNvCxnSpPr/>
-          <p:nvPr/>
-        </p:nvCxnSpPr>
-        <p:spPr>
-          <a:xfrm flipV="1">
-            <a:off x="10100201" y="1818301"/>
-            <a:ext cx="114953" cy="15427"/>
-          </a:xfrm>
-          <a:prstGeom prst="line">
-            <a:avLst/>
-          </a:prstGeom>
-          <a:ln w="25400">
-            <a:solidFill>
-              <a:srgbClr val="8EDBD4"/>
-            </a:solidFill>
-          </a:ln>
-          <a:effectLst/>
-        </p:spPr>
-      </p:cxnSp>
-      <p:cxnSp>
-        <p:nvCxnSpPr>
-          <p:cNvPr id="40" name="line39" descr="sci-ppt:C2-E34-039"/>
-          <p:cNvCxnSpPr/>
-          <p:nvPr/>
-        </p:nvCxnSpPr>
-        <p:spPr>
-          <a:xfrm flipV="1">
-            <a:off x="10215154" y="1804141"/>
-            <a:ext cx="114953" cy="14160"/>
-          </a:xfrm>
-          <a:prstGeom prst="line">
-            <a:avLst/>
-          </a:prstGeom>
-          <a:ln w="25400">
-            <a:solidFill>
-              <a:srgbClr val="8EDBD4"/>
-            </a:solidFill>
-          </a:ln>
-          <a:effectLst/>
-        </p:spPr>
-      </p:cxnSp>
-      <p:cxnSp>
-        <p:nvCxnSpPr>
-          <p:cNvPr id="41" name="line40" descr="sci-ppt:C2-E34-040"/>
-          <p:cNvCxnSpPr/>
-          <p:nvPr/>
-        </p:nvCxnSpPr>
-        <p:spPr>
-          <a:xfrm flipV="1">
-            <a:off x="10330107" y="1791144"/>
-            <a:ext cx="114953" cy="12997"/>
-          </a:xfrm>
-          <a:prstGeom prst="line">
-            <a:avLst/>
-          </a:prstGeom>
-          <a:ln w="25400">
-            <a:solidFill>
-              <a:srgbClr val="8EDBD4"/>
-            </a:solidFill>
-          </a:ln>
-          <a:effectLst/>
-        </p:spPr>
-      </p:cxnSp>
-      <p:cxnSp>
-        <p:nvCxnSpPr>
-          <p:cNvPr id="42" name="line41" descr="sci-ppt:C2-E34-041"/>
-          <p:cNvCxnSpPr/>
-          <p:nvPr/>
-        </p:nvCxnSpPr>
-        <p:spPr>
-          <a:xfrm flipV="1">
-            <a:off x="10445060" y="1779214"/>
-            <a:ext cx="114953" cy="11930"/>
-          </a:xfrm>
-          <a:prstGeom prst="line">
-            <a:avLst/>
-          </a:prstGeom>
-          <a:ln w="25400">
-            <a:solidFill>
-              <a:srgbClr val="8EDBD4"/>
-            </a:solidFill>
-          </a:ln>
-          <a:effectLst/>
-        </p:spPr>
-      </p:cxnSp>
-      <p:cxnSp>
-        <p:nvCxnSpPr>
-          <p:cNvPr id="43" name="line42" descr="sci-ppt:C2-E34-042"/>
-          <p:cNvCxnSpPr/>
-          <p:nvPr/>
-        </p:nvCxnSpPr>
-        <p:spPr>
-          <a:xfrm flipV="1">
-            <a:off x="10560013" y="1768265"/>
-            <a:ext cx="114953" cy="10949"/>
-          </a:xfrm>
-          <a:prstGeom prst="line">
-            <a:avLst/>
-          </a:prstGeom>
-          <a:ln w="25400">
-            <a:solidFill>
-              <a:srgbClr val="8EDBD4"/>
-            </a:solidFill>
-          </a:ln>
-          <a:effectLst/>
-        </p:spPr>
-      </p:cxnSp>
-      <p:cxnSp>
-        <p:nvCxnSpPr>
-          <p:cNvPr id="44" name="line43" descr="sci-ppt:C2-E34-043"/>
-          <p:cNvCxnSpPr/>
-          <p:nvPr/>
-        </p:nvCxnSpPr>
-        <p:spPr>
-          <a:xfrm flipV="1">
-            <a:off x="10674966" y="1758215"/>
-            <a:ext cx="114954" cy="10050"/>
-          </a:xfrm>
-          <a:prstGeom prst="line">
-            <a:avLst/>
-          </a:prstGeom>
-          <a:ln w="25400">
-            <a:solidFill>
-              <a:srgbClr val="8EDBD4"/>
-            </a:solidFill>
-          </a:ln>
-          <a:effectLst/>
-        </p:spPr>
-      </p:cxnSp>
-      <p:sp>
-        <p:nvSpPr>
-          <p:cNvPr id="45" name="text44" descr="sci-ppt:C2-E34-044"/>
+              <a:t>nucleation rate</a:t>
+            </a:r>
+          </a:p>
+          <a:p>
+            <a:pPr algn="ctr">
+              <a:spcAft>
+                <a:spcPts val="0"/>
+              </a:spcAft>
+            </a:pPr>
+            <a:r>
+              <a:rPr sz="1300" b="0" i="0">
+                <a:solidFill>
+                  <a:srgbClr val="E7F0F3"/>
+                </a:solidFill>
+                <a:latin typeface="Arial"/>
+              </a:rPr>
+              <a:t>m⁻³ s⁻¹</a:t>
+            </a:r>
+          </a:p>
+        </p:txBody>
+      </p:sp>
+      <p:sp>
+        <p:nvSpPr>
+          <p:cNvPr id="7" name="C2-E34 text 5" descr="sci-ppt:o005"/>
           <p:cNvSpPr txBox="1"/>
           <p:nvPr/>
         </p:nvSpPr>
         <p:spPr>
           <a:xfrm>
-            <a:off x="1341120" y="3657600"/>
-            <a:ext cx="9509760" cy="340156"/>
+            <a:off x="640080" y="3657600"/>
+            <a:ext cx="3383280" cy="223900"/>
           </a:xfrm>
           <a:prstGeom prst="rect">
             <a:avLst/>
@@ -4148,38 +3322,38 @@
           <a:effectLst/>
         </p:spPr>
         <p:txBody>
-          <a:bodyPr wrap="none" lIns="27432" rIns="27432" tIns="18288" bIns="18288" anchor="ctr">
+          <a:bodyPr wrap="none" lIns="18288" rIns="18288" tIns="18288" bIns="18288" anchor="t">
             <a:spAutoFit/>
           </a:bodyPr>
           <a:lstStyle/>
           <a:p>
-            <a:pPr algn="l">
+            <a:pPr algn="ctr">
               <a:spcAft>
                 <a:spcPts val="0"/>
               </a:spcAft>
             </a:pPr>
             <a:r>
-              <a:rPr sz="1728" b="0" i="0">
+              <a:rPr sz="1150" b="0" i="0">
                 <a:solidFill>
-                  <a:srgbClr val="E7F0F3"/>
+                  <a:srgbClr val="B4C7D2"/>
                 </a:solidFill>
                 <a:latin typeface="Arial"/>
               </a:rPr>
-              <a:t>Integrate the local rate over space and time.</a:t>
-            </a:r>
-          </a:p>
-        </p:txBody>
-      </p:sp>
-      <p:sp>
-        <p:nvSpPr>
-          <p:cNvPr id="46" name="text45" descr="sci-ppt:C2-E34-045"/>
+              <a:t>must be supplied by the material</a:t>
+            </a:r>
+          </a:p>
+        </p:txBody>
+      </p:sp>
+      <p:sp>
+        <p:nvSpPr>
+          <p:cNvPr id="8" name="C2-E34 text 6" descr="sci-ppt:o006"/>
           <p:cNvSpPr txBox="1"/>
           <p:nvPr/>
         </p:nvSpPr>
         <p:spPr>
           <a:xfrm>
-            <a:off x="365760" y="4974336"/>
-            <a:ext cx="5547360" cy="321259"/>
+            <a:off x="4096511" y="2743200"/>
+            <a:ext cx="274320" cy="355599"/>
           </a:xfrm>
           <a:prstGeom prst="rect">
             <a:avLst/>
@@ -4188,38 +3362,70 @@
           <a:effectLst/>
         </p:spPr>
         <p:txBody>
-          <a:bodyPr wrap="none" lIns="27432" rIns="27432" tIns="18288" bIns="18288" anchor="ctr">
+          <a:bodyPr wrap="none" lIns="18288" rIns="18288" tIns="18288" bIns="18288" anchor="t">
             <a:spAutoFit/>
           </a:bodyPr>
           <a:lstStyle/>
           <a:p>
-            <a:pPr algn="l">
+            <a:pPr algn="ctr">
               <a:spcAft>
                 <a:spcPts val="0"/>
               </a:spcAft>
             </a:pPr>
             <a:r>
-              <a:rPr sz="1632" b="0" i="0">
+              <a:rPr sz="2000" b="1" i="0">
                 <a:solidFill>
-                  <a:srgbClr val="E7F0F3"/>
+                  <a:srgbClr val="B4C7D2"/>
                 </a:solidFill>
                 <a:latin typeface="Arial"/>
               </a:rPr>
-              <a:t>T, p: local hot state</a:t>
-            </a:r>
-          </a:p>
-        </p:txBody>
-      </p:sp>
-      <p:sp>
-        <p:nvSpPr>
-          <p:cNvPr id="47" name="text46" descr="sci-ppt:C2-E34-046"/>
+              <a:t>×</a:t>
+            </a:r>
+          </a:p>
+        </p:txBody>
+      </p:sp>
+      <p:sp>
+        <p:nvSpPr>
+          <p:cNvPr id="9" name="C2-E34 round_rect 7" descr="sci-ppt:o007"/>
+          <p:cNvSpPr/>
+          <p:nvPr/>
+        </p:nvSpPr>
+        <p:spPr>
+          <a:xfrm>
+            <a:off x="4343400" y="1828800"/>
+            <a:ext cx="3566160" cy="2468880"/>
+          </a:xfrm>
+          <a:prstGeom prst="roundRect">
+            <a:avLst/>
+          </a:prstGeom>
+          <a:solidFill>
+            <a:srgbClr val="213E4B"/>
+          </a:solidFill>
+          <a:ln w="20320">
+            <a:solidFill>
+              <a:srgbClr val="8EDBD4"/>
+            </a:solidFill>
+          </a:ln>
+          <a:effectLst/>
+        </p:spPr>
+        <p:txBody>
+          <a:bodyPr rtlCol="0" anchor="ctr"/>
+          <a:lstStyle/>
+          <a:p>
+            <a:pPr algn="ctr"/>
+          </a:p>
+        </p:txBody>
+      </p:sp>
+      <p:sp>
+        <p:nvSpPr>
+          <p:cNvPr id="10" name="C2-E34 text 8" descr="sci-ppt:o008"/>
           <p:cNvSpPr txBox="1"/>
           <p:nvPr/>
         </p:nvSpPr>
         <p:spPr>
           <a:xfrm>
-            <a:off x="365760" y="5266944"/>
-            <a:ext cx="5547360" cy="321259"/>
+            <a:off x="4434840" y="1920240"/>
+            <a:ext cx="3383280" cy="309117"/>
           </a:xfrm>
           <a:prstGeom prst="rect">
             <a:avLst/>
@@ -4228,38 +3434,38 @@
           <a:effectLst/>
         </p:spPr>
         <p:txBody>
-          <a:bodyPr wrap="none" lIns="27432" rIns="27432" tIns="18288" bIns="18288" anchor="ctr">
+          <a:bodyPr wrap="none" lIns="18288" rIns="18288" tIns="18288" bIns="18288" anchor="t">
             <a:spAutoFit/>
           </a:bodyPr>
           <a:lstStyle/>
           <a:p>
-            <a:pPr algn="l">
+            <a:pPr algn="ctr">
               <a:spcAft>
                 <a:spcPts val="0"/>
               </a:spcAft>
             </a:pPr>
             <a:r>
-              <a:rPr sz="1632" b="0" i="0">
+              <a:rPr sz="1700" b="1" i="0">
                 <a:solidFill>
-                  <a:srgbClr val="E7F0F3"/>
+                  <a:srgbClr val="8EDBD4"/>
                 </a:solidFill>
                 <a:latin typeface="Arial"/>
               </a:rPr>
-              <a:t>V_d(t′): available liquid</a:t>
-            </a:r>
-          </a:p>
-        </p:txBody>
-      </p:sp>
-      <p:sp>
-        <p:nvSpPr>
-          <p:cNvPr id="48" name="text47" descr="sci-ppt:C2-E34-047"/>
+              <a:t>V_d(t′)</a:t>
+            </a:r>
+          </a:p>
+        </p:txBody>
+      </p:sp>
+      <p:sp>
+        <p:nvSpPr>
+          <p:cNvPr id="11" name="C2-E34 text 9" descr="sci-ppt:o009"/>
           <p:cNvSpPr txBox="1"/>
           <p:nvPr/>
         </p:nvSpPr>
         <p:spPr>
           <a:xfrm>
-            <a:off x="365760" y="5559552"/>
-            <a:ext cx="5547360" cy="321259"/>
+            <a:off x="4434840" y="2606040"/>
+            <a:ext cx="3383280" cy="649986"/>
           </a:xfrm>
           <a:prstGeom prst="rect">
             <a:avLst/>
@@ -4268,38 +3474,70 @@
           <a:effectLst/>
         </p:spPr>
         <p:txBody>
-          <a:bodyPr wrap="none" lIns="27432" rIns="27432" tIns="18288" bIns="18288" anchor="ctr">
+          <a:bodyPr wrap="none" lIns="18288" rIns="18288" tIns="18288" bIns="18288" anchor="t">
             <a:spAutoFit/>
           </a:bodyPr>
           <a:lstStyle/>
           <a:p>
-            <a:pPr algn="l">
+            <a:pPr algn="ctr">
               <a:spcAft>
                 <a:spcPts val="0"/>
               </a:spcAft>
             </a:pPr>
             <a:r>
-              <a:rPr sz="1632" b="0" i="0">
+              <a:rPr sz="1300" b="0" i="0">
                 <a:solidFill>
                   <a:srgbClr val="E7F0F3"/>
                 </a:solidFill>
                 <a:latin typeface="Arial"/>
               </a:rPr>
-              <a:t>P_act: activation probability</a:t>
-            </a:r>
-          </a:p>
-        </p:txBody>
-      </p:sp>
-      <p:sp>
-        <p:nvSpPr>
-          <p:cNvPr id="49" name="text48" descr="sci-ppt:C2-E34-048"/>
+              <a:t>liquid volume that</a:t>
+            </a:r>
+          </a:p>
+          <a:p>
+            <a:pPr algn="ctr">
+              <a:spcAft>
+                <a:spcPts val="0"/>
+              </a:spcAft>
+            </a:pPr>
+            <a:r>
+              <a:rPr sz="1300" b="0" i="0">
+                <a:solidFill>
+                  <a:srgbClr val="E7F0F3"/>
+                </a:solidFill>
+                <a:latin typeface="Arial"/>
+              </a:rPr>
+              <a:t>can nucleate</a:t>
+            </a:r>
+          </a:p>
+          <a:p>
+            <a:pPr algn="ctr">
+              <a:spcAft>
+                <a:spcPts val="0"/>
+              </a:spcAft>
+            </a:pPr>
+            <a:r>
+              <a:rPr sz="1300" b="0" i="0">
+                <a:solidFill>
+                  <a:srgbClr val="E7F0F3"/>
+                </a:solidFill>
+                <a:latin typeface="Arial"/>
+              </a:rPr>
+              <a:t>m³</a:t>
+            </a:r>
+          </a:p>
+        </p:txBody>
+      </p:sp>
+      <p:sp>
+        <p:nvSpPr>
+          <p:cNvPr id="12" name="C2-E34 text 10" descr="sci-ppt:o010"/>
           <p:cNvSpPr txBox="1"/>
           <p:nvPr/>
         </p:nvSpPr>
         <p:spPr>
           <a:xfrm>
-            <a:off x="6156960" y="4974336"/>
-            <a:ext cx="5547360" cy="321259"/>
+            <a:off x="4434840" y="3657600"/>
+            <a:ext cx="3383280" cy="223900"/>
           </a:xfrm>
           <a:prstGeom prst="rect">
             <a:avLst/>
@@ -4308,38 +3546,38 @@
           <a:effectLst/>
         </p:spPr>
         <p:txBody>
-          <a:bodyPr wrap="none" lIns="27432" rIns="27432" tIns="18288" bIns="18288" anchor="ctr">
+          <a:bodyPr wrap="none" lIns="18288" rIns="18288" tIns="18288" bIns="18288" anchor="t">
             <a:spAutoFit/>
           </a:bodyPr>
           <a:lstStyle/>
           <a:p>
-            <a:pPr algn="l">
+            <a:pPr algn="ctr">
               <a:spcAft>
                 <a:spcPts val="0"/>
               </a:spcAft>
             </a:pPr>
             <a:r>
-              <a:rPr sz="1632" b="0" i="0">
+              <a:rPr sz="1150" b="0" i="0">
                 <a:solidFill>
-                  <a:srgbClr val="E7F0F3"/>
+                  <a:srgbClr val="B4C7D2"/>
                 </a:solidFill>
                 <a:latin typeface="Arial"/>
               </a:rPr>
-              <a:t>J: supplied event rate</a:t>
-            </a:r>
-          </a:p>
-        </p:txBody>
-      </p:sp>
-      <p:sp>
-        <p:nvSpPr>
-          <p:cNvPr id="50" name="text49" descr="sci-ppt:C2-E34-049"/>
+              <a:t>shrinks as PFC leaves the liquid</a:t>
+            </a:r>
+          </a:p>
+        </p:txBody>
+      </p:sp>
+      <p:sp>
+        <p:nvSpPr>
+          <p:cNvPr id="13" name="C2-E34 text 11" descr="sci-ppt:o011"/>
           <p:cNvSpPr txBox="1"/>
           <p:nvPr/>
         </p:nvSpPr>
         <p:spPr>
           <a:xfrm>
-            <a:off x="6156960" y="5266944"/>
-            <a:ext cx="5547360" cy="321259"/>
+            <a:off x="7891271" y="2743200"/>
+            <a:ext cx="274320" cy="355599"/>
           </a:xfrm>
           <a:prstGeom prst="rect">
             <a:avLst/>
@@ -4348,38 +3586,70 @@
           <a:effectLst/>
         </p:spPr>
         <p:txBody>
-          <a:bodyPr wrap="none" lIns="27432" rIns="27432" tIns="18288" bIns="18288" anchor="ctr">
+          <a:bodyPr wrap="none" lIns="18288" rIns="18288" tIns="18288" bIns="18288" anchor="t">
             <a:spAutoFit/>
           </a:bodyPr>
           <a:lstStyle/>
           <a:p>
-            <a:pPr algn="l">
+            <a:pPr algn="ctr">
               <a:spcAft>
                 <a:spcPts val="0"/>
               </a:spcAft>
             </a:pPr>
             <a:r>
-              <a:rPr sz="1632" b="0" i="0">
+              <a:rPr sz="2000" b="1" i="0">
                 <a:solidFill>
-                  <a:srgbClr val="E7F0F3"/>
+                  <a:srgbClr val="B4C7D2"/>
                 </a:solidFill>
                 <a:latin typeface="Arial"/>
               </a:rPr>
-              <a:t>t, t′, dV: event integration</a:t>
-            </a:r>
-          </a:p>
-        </p:txBody>
-      </p:sp>
-      <p:sp>
-        <p:nvSpPr>
-          <p:cNvPr id="51" name="text50" descr="sci-ppt:C2-E34-050"/>
+              <a:t>×</a:t>
+            </a:r>
+          </a:p>
+        </p:txBody>
+      </p:sp>
+      <p:sp>
+        <p:nvSpPr>
+          <p:cNvPr id="14" name="C2-E34 round_rect 12" descr="sci-ppt:o012"/>
+          <p:cNvSpPr/>
+          <p:nvPr/>
+        </p:nvSpPr>
+        <p:spPr>
+          <a:xfrm>
+            <a:off x="8138160" y="1828800"/>
+            <a:ext cx="3566160" cy="2468880"/>
+          </a:xfrm>
+          <a:prstGeom prst="roundRect">
+            <a:avLst/>
+          </a:prstGeom>
+          <a:solidFill>
+            <a:srgbClr val="213E4B"/>
+          </a:solidFill>
+          <a:ln w="20320">
+            <a:solidFill>
+              <a:srgbClr val="F2B880"/>
+            </a:solidFill>
+          </a:ln>
+          <a:effectLst/>
+        </p:spPr>
+        <p:txBody>
+          <a:bodyPr rtlCol="0" anchor="ctr"/>
+          <a:lstStyle/>
+          <a:p>
+            <a:pPr algn="ctr"/>
+          </a:p>
+        </p:txBody>
+      </p:sp>
+      <p:sp>
+        <p:nvSpPr>
+          <p:cNvPr id="15" name="C2-E34 text 13" descr="sci-ppt:o013"/>
           <p:cNvSpPr txBox="1"/>
           <p:nvPr/>
         </p:nvSpPr>
         <p:spPr>
           <a:xfrm>
-            <a:off x="365760" y="6278880"/>
-            <a:ext cx="11277600" cy="302361"/>
+            <a:off x="8229600" y="1920240"/>
+            <a:ext cx="3383280" cy="309117"/>
           </a:xfrm>
           <a:prstGeom prst="rect">
             <a:avLst/>
@@ -4388,38 +3658,38 @@
           <a:effectLst/>
         </p:spPr>
         <p:txBody>
-          <a:bodyPr wrap="none" lIns="27432" rIns="27432" tIns="18288" bIns="18288" anchor="ctr">
+          <a:bodyPr wrap="none" lIns="18288" rIns="18288" tIns="18288" bIns="18288" anchor="t">
             <a:spAutoFit/>
           </a:bodyPr>
           <a:lstStyle/>
           <a:p>
-            <a:pPr algn="l">
+            <a:pPr algn="ctr">
               <a:spcAft>
                 <a:spcPts val="0"/>
               </a:spcAft>
             </a:pPr>
             <a:r>
-              <a:rPr sz="1536" b="0" i="0">
+              <a:rPr sz="1700" b="1" i="0">
                 <a:solidFill>
-                  <a:srgbClr val="B4C7D2"/>
+                  <a:srgbClr val="F2B880"/>
                 </a:solidFill>
                 <a:latin typeface="Arial"/>
               </a:rPr>
-              <a:t>A rate law or calibrated activation law is still required</a:t>
-            </a:r>
-          </a:p>
-        </p:txBody>
-      </p:sp>
-      <p:sp>
-        <p:nvSpPr>
-          <p:cNvPr id="52" name="text51" descr="sci-ppt:C2-E34-051"/>
+              <a:t>t′ from 0 to t</a:t>
+            </a:r>
+          </a:p>
+        </p:txBody>
+      </p:sp>
+      <p:sp>
+        <p:nvSpPr>
+          <p:cNvPr id="16" name="C2-E34 text 14" descr="sci-ppt:o014"/>
           <p:cNvSpPr txBox="1"/>
           <p:nvPr/>
         </p:nvSpPr>
         <p:spPr>
           <a:xfrm>
-            <a:off x="365760" y="6571488"/>
-            <a:ext cx="11277600" cy="302361"/>
+            <a:off x="8229600" y="2606040"/>
+            <a:ext cx="3383280" cy="649986"/>
           </a:xfrm>
           <a:prstGeom prst="rect">
             <a:avLst/>
@@ -4428,7 +3698,119 @@
           <a:effectLst/>
         </p:spPr>
         <p:txBody>
-          <a:bodyPr wrap="none" lIns="27432" rIns="27432" tIns="18288" bIns="18288" anchor="ctr">
+          <a:bodyPr wrap="none" lIns="18288" rIns="18288" tIns="18288" bIns="18288" anchor="t">
+            <a:spAutoFit/>
+          </a:bodyPr>
+          <a:lstStyle/>
+          <a:p>
+            <a:pPr algn="ctr">
+              <a:spcAft>
+                <a:spcPts val="0"/>
+              </a:spcAft>
+            </a:pPr>
+            <a:r>
+              <a:rPr sz="1300" b="0" i="0">
+                <a:solidFill>
+                  <a:srgbClr val="E7F0F3"/>
+                </a:solidFill>
+                <a:latin typeface="Arial"/>
+              </a:rPr>
+              <a:t>time spent in the</a:t>
+            </a:r>
+          </a:p>
+          <a:p>
+            <a:pPr algn="ctr">
+              <a:spcAft>
+                <a:spcPts val="0"/>
+              </a:spcAft>
+            </a:pPr>
+            <a:r>
+              <a:rPr sz="1300" b="0" i="0">
+                <a:solidFill>
+                  <a:srgbClr val="E7F0F3"/>
+                </a:solidFill>
+                <a:latin typeface="Arial"/>
+              </a:rPr>
+              <a:t>activating state</a:t>
+            </a:r>
+          </a:p>
+          <a:p>
+            <a:pPr algn="ctr">
+              <a:spcAft>
+                <a:spcPts val="0"/>
+              </a:spcAft>
+            </a:pPr>
+            <a:r>
+              <a:rPr sz="1300" b="0" i="0">
+                <a:solidFill>
+                  <a:srgbClr val="E7F0F3"/>
+                </a:solidFill>
+                <a:latin typeface="Arial"/>
+              </a:rPr>
+              <a:t>s</a:t>
+            </a:r>
+          </a:p>
+        </p:txBody>
+      </p:sp>
+      <p:sp>
+        <p:nvSpPr>
+          <p:cNvPr id="17" name="C2-E34 text 15" descr="sci-ppt:o015"/>
+          <p:cNvSpPr txBox="1"/>
+          <p:nvPr/>
+        </p:nvSpPr>
+        <p:spPr>
+          <a:xfrm>
+            <a:off x="8229600" y="3657600"/>
+            <a:ext cx="3383280" cy="223900"/>
+          </a:xfrm>
+          <a:prstGeom prst="rect">
+            <a:avLst/>
+          </a:prstGeom>
+          <a:noFill/>
+          <a:effectLst/>
+        </p:spPr>
+        <p:txBody>
+          <a:bodyPr wrap="none" lIns="18288" rIns="18288" tIns="18288" bIns="18288" anchor="t">
+            <a:spAutoFit/>
+          </a:bodyPr>
+          <a:lstStyle/>
+          <a:p>
+            <a:pPr algn="ctr">
+              <a:spcAft>
+                <a:spcPts val="0"/>
+              </a:spcAft>
+            </a:pPr>
+            <a:r>
+              <a:rPr sz="1150" b="0" i="0">
+                <a:solidFill>
+                  <a:srgbClr val="B4C7D2"/>
+                </a:solidFill>
+                <a:latin typeface="Arial"/>
+              </a:rPr>
+              <a:t>set by the heating history</a:t>
+            </a:r>
+          </a:p>
+        </p:txBody>
+      </p:sp>
+      <p:sp>
+        <p:nvSpPr>
+          <p:cNvPr id="18" name="C2-E34 text 16" descr="sci-ppt:o016"/>
+          <p:cNvSpPr txBox="1"/>
+          <p:nvPr/>
+        </p:nvSpPr>
+        <p:spPr>
+          <a:xfrm>
+            <a:off x="548640" y="4617720"/>
+            <a:ext cx="11155680" cy="448563"/>
+          </a:xfrm>
+          <a:prstGeom prst="rect">
+            <a:avLst/>
+          </a:prstGeom>
+          <a:noFill/>
+          <a:effectLst/>
+        </p:spPr>
+        <p:txBody>
+          <a:bodyPr wrap="none" lIns="18288" rIns="18288" tIns="18288" bIns="18288" anchor="t">
             <a:spAutoFit/>
           </a:bodyPr>
           <a:lstStyle/>
@@ -4439,13 +3821,109 @@
               </a:spcAft>
             </a:pPr>
             <a:r>
-              <a:rPr sz="1536" b="0" i="0">
+              <a:rPr sz="1300" b="0" i="0">
+                <a:solidFill>
+                  <a:srgbClr val="E7F0F3"/>
+                </a:solidFill>
+                <a:latin typeface="Arial"/>
+              </a:rPr>
+              <a:t>The exponent is the expected number of events. Independent events and a finite integrated rate give a probability between 0 and</a:t>
+            </a:r>
+          </a:p>
+          <a:p>
+            <a:pPr algn="l">
+              <a:spcAft>
+                <a:spcPts val="0"/>
+              </a:spcAft>
+            </a:pPr>
+            <a:r>
+              <a:rPr sz="1300" b="0" i="0">
+                <a:solidFill>
+                  <a:srgbClr val="E7F0F3"/>
+                </a:solidFill>
+                <a:latin typeface="Arial"/>
+              </a:rPr>
+              <a:t>1.</a:t>
+            </a:r>
+          </a:p>
+        </p:txBody>
+      </p:sp>
+      <p:sp>
+        <p:nvSpPr>
+          <p:cNvPr id="19" name="C2-E34 text 17" descr="sci-ppt:o017"/>
+          <p:cNvSpPr txBox="1"/>
+          <p:nvPr/>
+        </p:nvSpPr>
+        <p:spPr>
+          <a:xfrm>
+            <a:off x="548640" y="5212080"/>
+            <a:ext cx="11155680" cy="254889"/>
+          </a:xfrm>
+          <a:prstGeom prst="rect">
+            <a:avLst/>
+          </a:prstGeom>
+          <a:noFill/>
+          <a:effectLst/>
+        </p:spPr>
+        <p:txBody>
+          <a:bodyPr wrap="none" lIns="18288" rIns="18288" tIns="18288" bIns="18288" anchor="t">
+            <a:spAutoFit/>
+          </a:bodyPr>
+          <a:lstStyle/>
+          <a:p>
+            <a:pPr algn="l">
+              <a:spcAft>
+                <a:spcPts val="0"/>
+              </a:spcAft>
+            </a:pPr>
+            <a:r>
+              <a:rPr sz="1350" b="1" i="0">
+                <a:solidFill>
+                  <a:srgbClr val="F2B880"/>
+                </a:solidFill>
+                <a:latin typeface="Arial"/>
+              </a:rPr>
+              <a:t>The formula organises the problem but does not replace the missing, material-specific J(T, p).</a:t>
+            </a:r>
+          </a:p>
+        </p:txBody>
+      </p:sp>
+      <p:sp>
+        <p:nvSpPr>
+          <p:cNvPr id="20" name="C2-E34 text 18" descr="sci-ppt:o018"/>
+          <p:cNvSpPr txBox="1"/>
+          <p:nvPr/>
+        </p:nvSpPr>
+        <p:spPr>
+          <a:xfrm>
+            <a:off x="320040" y="6510528"/>
+            <a:ext cx="11521440" cy="200660"/>
+          </a:xfrm>
+          <a:prstGeom prst="rect">
+            <a:avLst/>
+          </a:prstGeom>
+          <a:noFill/>
+          <a:effectLst/>
+        </p:spPr>
+        <p:txBody>
+          <a:bodyPr wrap="none" lIns="18288" rIns="18288" tIns="18288" bIns="18288" anchor="t">
+            <a:spAutoFit/>
+          </a:bodyPr>
+          <a:lstStyle/>
+          <a:p>
+            <a:pPr algn="l">
+              <a:spcAft>
+                <a:spcPts val="0"/>
+              </a:spcAft>
+            </a:pPr>
+            <a:r>
+              <a:rPr sz="1000" b="0" i="0">
                 <a:solidFill>
                   <a:srgbClr val="B4C7D2"/>
                 </a:solidFill>
                 <a:latin typeface="Arial"/>
               </a:rPr>
-              <a:t>One absent event does not prove impossibility</a:t>
+              <a:t>Activation probability of Eq. C2-E34 (Poisson model).</a:t>
             </a:r>
           </a:p>
         </p:txBody>
